--- a/week report/8.4 report.pptx
+++ b/week report/8.4 report.pptx
@@ -205,7 +205,7 @@
           <a:p>
             <a:fld id="{F4BC8E43-2426-4AB4-B1DA-94A32D613D40}" type="datetimeFigureOut">
               <a:rPr lang="zh-CN" altLang="en-US" smtClean="0"/>
-              <a:t>2021/8/4</a:t>
+              <a:t>2021/8/29</a:t>
             </a:fld>
             <a:endParaRPr lang="zh-CN" altLang="en-US"/>
           </a:p>
@@ -1036,7 +1036,7 @@
           <a:p>
             <a:fld id="{DCC080BC-FD8F-4BC7-912D-250C973482EE}" type="datetimeFigureOut">
               <a:rPr lang="zh-CN" altLang="en-US" smtClean="0"/>
-              <a:t>2021/8/4</a:t>
+              <a:t>2021/8/29</a:t>
             </a:fld>
             <a:endParaRPr lang="zh-CN" altLang="en-US"/>
           </a:p>
@@ -1206,7 +1206,7 @@
           <a:p>
             <a:fld id="{DCC080BC-FD8F-4BC7-912D-250C973482EE}" type="datetimeFigureOut">
               <a:rPr lang="zh-CN" altLang="en-US" smtClean="0"/>
-              <a:t>2021/8/4</a:t>
+              <a:t>2021/8/29</a:t>
             </a:fld>
             <a:endParaRPr lang="zh-CN" altLang="en-US"/>
           </a:p>
@@ -1386,7 +1386,7 @@
           <a:p>
             <a:fld id="{DCC080BC-FD8F-4BC7-912D-250C973482EE}" type="datetimeFigureOut">
               <a:rPr lang="zh-CN" altLang="en-US" smtClean="0"/>
-              <a:t>2021/8/4</a:t>
+              <a:t>2021/8/29</a:t>
             </a:fld>
             <a:endParaRPr lang="zh-CN" altLang="en-US"/>
           </a:p>
@@ -1556,7 +1556,7 @@
           <a:p>
             <a:fld id="{DCC080BC-FD8F-4BC7-912D-250C973482EE}" type="datetimeFigureOut">
               <a:rPr lang="zh-CN" altLang="en-US" smtClean="0"/>
-              <a:t>2021/8/4</a:t>
+              <a:t>2021/8/29</a:t>
             </a:fld>
             <a:endParaRPr lang="zh-CN" altLang="en-US"/>
           </a:p>
@@ -1802,7 +1802,7 @@
           <a:p>
             <a:fld id="{DCC080BC-FD8F-4BC7-912D-250C973482EE}" type="datetimeFigureOut">
               <a:rPr lang="zh-CN" altLang="en-US" smtClean="0"/>
-              <a:t>2021/8/4</a:t>
+              <a:t>2021/8/29</a:t>
             </a:fld>
             <a:endParaRPr lang="zh-CN" altLang="en-US"/>
           </a:p>
@@ -2034,7 +2034,7 @@
           <a:p>
             <a:fld id="{DCC080BC-FD8F-4BC7-912D-250C973482EE}" type="datetimeFigureOut">
               <a:rPr lang="zh-CN" altLang="en-US" smtClean="0"/>
-              <a:t>2021/8/4</a:t>
+              <a:t>2021/8/29</a:t>
             </a:fld>
             <a:endParaRPr lang="zh-CN" altLang="en-US"/>
           </a:p>
@@ -2401,7 +2401,7 @@
           <a:p>
             <a:fld id="{DCC080BC-FD8F-4BC7-912D-250C973482EE}" type="datetimeFigureOut">
               <a:rPr lang="zh-CN" altLang="en-US" smtClean="0"/>
-              <a:t>2021/8/4</a:t>
+              <a:t>2021/8/29</a:t>
             </a:fld>
             <a:endParaRPr lang="zh-CN" altLang="en-US"/>
           </a:p>
@@ -2519,7 +2519,7 @@
           <a:p>
             <a:fld id="{DCC080BC-FD8F-4BC7-912D-250C973482EE}" type="datetimeFigureOut">
               <a:rPr lang="zh-CN" altLang="en-US" smtClean="0"/>
-              <a:t>2021/8/4</a:t>
+              <a:t>2021/8/29</a:t>
             </a:fld>
             <a:endParaRPr lang="zh-CN" altLang="en-US"/>
           </a:p>
@@ -2614,7 +2614,7 @@
           <a:p>
             <a:fld id="{DCC080BC-FD8F-4BC7-912D-250C973482EE}" type="datetimeFigureOut">
               <a:rPr lang="zh-CN" altLang="en-US" smtClean="0"/>
-              <a:t>2021/8/4</a:t>
+              <a:t>2021/8/29</a:t>
             </a:fld>
             <a:endParaRPr lang="zh-CN" altLang="en-US"/>
           </a:p>
@@ -2891,7 +2891,7 @@
           <a:p>
             <a:fld id="{DCC080BC-FD8F-4BC7-912D-250C973482EE}" type="datetimeFigureOut">
               <a:rPr lang="zh-CN" altLang="en-US" smtClean="0"/>
-              <a:t>2021/8/4</a:t>
+              <a:t>2021/8/29</a:t>
             </a:fld>
             <a:endParaRPr lang="zh-CN" altLang="en-US"/>
           </a:p>
@@ -3144,7 +3144,7 @@
           <a:p>
             <a:fld id="{DCC080BC-FD8F-4BC7-912D-250C973482EE}" type="datetimeFigureOut">
               <a:rPr lang="zh-CN" altLang="en-US" smtClean="0"/>
-              <a:t>2021/8/4</a:t>
+              <a:t>2021/8/29</a:t>
             </a:fld>
             <a:endParaRPr lang="zh-CN" altLang="en-US"/>
           </a:p>
@@ -3357,7 +3357,7 @@
           <a:p>
             <a:fld id="{DCC080BC-FD8F-4BC7-912D-250C973482EE}" type="datetimeFigureOut">
               <a:rPr lang="zh-CN" altLang="en-US" smtClean="0"/>
-              <a:t>2021/8/4</a:t>
+              <a:t>2021/8/29</a:t>
             </a:fld>
             <a:endParaRPr lang="zh-CN" altLang="en-US"/>
           </a:p>
@@ -16463,7 +16463,7 @@
           <a:p>
             <a:fld id="{7E66CBCB-337D-49B6-B73D-DC76D0E029C4}" type="datetime1">
               <a:rPr lang="zh-CN" altLang="en-US" smtClean="0"/>
-              <a:t>2021/8/4</a:t>
+              <a:t>2021/8/29</a:t>
             </a:fld>
             <a:endParaRPr lang="zh-CN" altLang="en-US" dirty="0"/>
           </a:p>
@@ -16773,7 +16773,7 @@
             </a:r>
             <a:r>
               <a:rPr lang="zh-CN" altLang="en-US" dirty="0" smtClean="0"/>
-              <a:t>歌的 换了计算图之后就要重新训练 </a:t>
+              <a:t>歌</a:t>
             </a:r>
             <a:r>
               <a:rPr lang="en-US" altLang="zh-CN" dirty="0" smtClean="0"/>
@@ -16789,7 +16789,47 @@
             </a:r>
             <a:r>
               <a:rPr lang="zh-CN" altLang="en-US" dirty="0" smtClean="0"/>
-              <a:t>可以同时优化多个模型训练</a:t>
+              <a:t>可以同时优化多个模型</a:t>
+            </a:r>
+            <a:r>
+              <a:rPr lang="zh-CN" altLang="en-US" dirty="0" smtClean="0"/>
+              <a:t>训练</a:t>
+            </a:r>
+            <a:r>
+              <a:rPr lang="en-US" altLang="zh-CN" dirty="0" smtClean="0"/>
+              <a:t>(</a:t>
+            </a:r>
+            <a:r>
+              <a:rPr lang="zh-CN" altLang="en-US" dirty="0" smtClean="0"/>
+              <a:t>这不一样的</a:t>
+            </a:r>
+            <a:r>
+              <a:rPr lang="en-US" altLang="zh-CN" dirty="0" smtClean="0"/>
+              <a:t>, </a:t>
+            </a:r>
+            <a:r>
+              <a:rPr lang="zh-CN" altLang="en-US" dirty="0" smtClean="0"/>
+              <a:t>他们是模型切分</a:t>
+            </a:r>
+            <a:r>
+              <a:rPr lang="en-US" altLang="zh-CN" dirty="0" smtClean="0"/>
+              <a:t>, </a:t>
+            </a:r>
+            <a:r>
+              <a:rPr lang="zh-CN" altLang="en-US" dirty="0" smtClean="0"/>
+              <a:t>我们是数据切分</a:t>
+            </a:r>
+            <a:r>
+              <a:rPr lang="en-US" altLang="zh-CN" dirty="0" smtClean="0"/>
+              <a:t>, </a:t>
+            </a:r>
+            <a:r>
+              <a:rPr lang="zh-CN" altLang="en-US" dirty="0" smtClean="0"/>
+              <a:t>不是一个维度的东西</a:t>
+            </a:r>
+            <a:r>
+              <a:rPr lang="en-US" altLang="zh-CN" dirty="0" smtClean="0"/>
+              <a:t>)</a:t>
             </a:r>
             <a:r>
               <a:rPr lang="zh-CN" altLang="en-US" dirty="0"/>
